--- a/Slides/Semana 1/semana_1_slides.pptx
+++ b/Slides/Semana 1/semana_1_slides.pptx
@@ -704,7 +704,7 @@
 - "Por que uma ação social qualquer não é necessariamente extensão universitária?"
 - "Que tipo de contribuição cada um de vocês pode oferecer a uma equipe?"
 Avaliação nesta semana: apenas observação inicial e informal de Trabalho em Equipe e Gestão do Projeto, conforme Rubrica de Avaliação — sem atribuição de nota.
-Fonte: Plano Semanal Semana 1, Cronograma, CLAUDE.md, COURSE_CONTEXT.md, PEDAGOGICAL_RULES.md, EXTENSION_PROJECT_GUIDE.md.</a:t>
+Fonte: Plano Semanal Semana 1, Cronograma.</a:t>
             </a:r>
             <a:endParaRPr lang="en-US" dirty="0"/>
           </a:p>
